--- a/labs/090-lab-modifying-source-code/assets/Modifying Source Code SUBMISSION TEMPLATE.pptx
+++ b/labs/090-lab-modifying-source-code/assets/Modifying Source Code SUBMISSION TEMPLATE.pptx
@@ -6971,7 +6971,8 @@
           <a:lstStyle/>
           <a:p>
             <a:r>
-              <a:t>Screenshot 1</a:t>
+              <a:rPr sz="2200"/>
+              <a:t>Screenshot 1 Source code downloaded into your home directory.</a:t>
             </a:r>
           </a:p>
         </p:txBody>
@@ -6998,11 +6999,7 @@
             <a:normAutofit/>
           </a:bodyPr>
           <a:lstStyle/>
-          <a:p>
-            <a:r>
-              <a:t>Source code downloaded into your home directory.</a:t>
-            </a:r>
-          </a:p>
+          <a:p/>
         </p:txBody>
       </p:sp>
     </p:spTree>
@@ -7054,7 +7051,8 @@
           <a:lstStyle/>
           <a:p>
             <a:r>
-              <a:t>Screenshot 2</a:t>
+              <a:rPr sz="2200"/>
+              <a:t>Screenshot 2 Edited version_string block in traceroute.c.</a:t>
             </a:r>
           </a:p>
         </p:txBody>
@@ -7081,11 +7079,7 @@
             <a:normAutofit/>
           </a:bodyPr>
           <a:lstStyle/>
-          <a:p>
-            <a:r>
-              <a:t>Edited version_string block in traceroute.c.</a:t>
-            </a:r>
-          </a:p>
+          <a:p/>
         </p:txBody>
       </p:sp>
     </p:spTree>
@@ -7137,7 +7131,8 @@
           <a:lstStyle/>
           <a:p>
             <a:r>
-              <a:t>Screenshot 3</a:t>
+              <a:rPr sz="2400"/>
+              <a:t>Screenshot 3 Successful make.</a:t>
             </a:r>
           </a:p>
         </p:txBody>
@@ -7164,11 +7159,7 @@
             <a:normAutofit/>
           </a:bodyPr>
           <a:lstStyle/>
-          <a:p>
-            <a:r>
-              <a:t>Successful make.</a:t>
-            </a:r>
-          </a:p>
+          <a:p/>
         </p:txBody>
       </p:sp>
     </p:spTree>
@@ -7220,7 +7211,8 @@
           <a:lstStyle/>
           <a:p>
             <a:r>
-              <a:t>Screenshot 4</a:t>
+              <a:rPr sz="2200"/>
+              <a:t>Screenshot 4 ./traceroute -V showing your custom version string.</a:t>
             </a:r>
           </a:p>
         </p:txBody>
@@ -7247,11 +7239,7 @@
             <a:normAutofit/>
           </a:bodyPr>
           <a:lstStyle/>
-          <a:p>
-            <a:r>
-              <a:t>./traceroute -V showing your custom version string.</a:t>
-            </a:r>
-          </a:p>
+          <a:p/>
         </p:txBody>
       </p:sp>
     </p:spTree>
@@ -7303,7 +7291,8 @@
           <a:lstStyle/>
           <a:p>
             <a:r>
-              <a:t>Screenshot 5</a:t>
+              <a:rPr sz="2400"/>
+              <a:t>Screenshot 5 Successful sudo make install.</a:t>
             </a:r>
           </a:p>
         </p:txBody>
@@ -7330,11 +7319,7 @@
             <a:normAutofit/>
           </a:bodyPr>
           <a:lstStyle/>
-          <a:p>
-            <a:r>
-              <a:t>Successful sudo make install.</a:t>
-            </a:r>
-          </a:p>
+          <a:p/>
         </p:txBody>
       </p:sp>
     </p:spTree>
@@ -7386,7 +7371,8 @@
           <a:lstStyle/>
           <a:p>
             <a:r>
-              <a:t>Screenshot 6</a:t>
+              <a:rPr sz="2000"/>
+              <a:t>Screenshot 6 traceroute -V run from your home directory after install.</a:t>
             </a:r>
           </a:p>
         </p:txBody>
@@ -7413,11 +7399,7 @@
             <a:normAutofit/>
           </a:bodyPr>
           <a:lstStyle/>
-          <a:p>
-            <a:r>
-              <a:t>traceroute -V run from your home directory after install.</a:t>
-            </a:r>
-          </a:p>
+          <a:p/>
         </p:txBody>
       </p:sp>
     </p:spTree>
@@ -7469,7 +7451,8 @@
           <a:lstStyle/>
           <a:p>
             <a:r>
-              <a:t>Screenshot 7</a:t>
+              <a:rPr sz="2200"/>
+              <a:t>Screenshot 7 A working traceroute command to www.google.ca.</a:t>
             </a:r>
           </a:p>
         </p:txBody>
@@ -7496,11 +7479,7 @@
             <a:normAutofit/>
           </a:bodyPr>
           <a:lstStyle/>
-          <a:p>
-            <a:r>
-              <a:t>A working traceroute command to www.google.ca.</a:t>
-            </a:r>
-          </a:p>
+          <a:p/>
         </p:txBody>
       </p:sp>
     </p:spTree>
